--- a/UCAL_Plantilla.pptx
+++ b/UCAL_Plantilla.pptx
@@ -12645,117 +12645,98 @@
           </p:txBody>
         </p:sp>
       </p:grpSp>
-      <p:grpSp>
-        <p:nvGrpSpPr>
-          <p:cNvPr id="107" name="Google Shape;107;p1"/>
-          <p:cNvGrpSpPr/>
+      <p:sp>
+        <p:nvSpPr>
+          <p:cNvPr id="108" name="Google Shape;108;p1"/>
+          <p:cNvSpPr txBox="1"/>
           <p:nvPr/>
-        </p:nvGrpSpPr>
-        <p:grpSpPr>
+        </p:nvSpPr>
+        <p:spPr>
           <a:xfrm>
-            <a:off x="1379602" y="2830308"/>
-            <a:ext cx="7146900" cy="590931"/>
-            <a:chOff x="0" y="159436"/>
-            <a:chExt cx="9529200" cy="787906"/>
+            <a:off x="815116" y="2907406"/>
+            <a:ext cx="8275768" cy="369332"/>
           </a:xfrm>
-        </p:grpSpPr>
-        <p:sp>
-          <p:nvSpPr>
-            <p:cNvPr id="108" name="Google Shape;108;p1"/>
-            <p:cNvSpPr txBox="1"/>
-            <p:nvPr/>
-          </p:nvSpPr>
-          <p:spPr>
-            <a:xfrm>
-              <a:off x="0" y="159436"/>
-              <a:ext cx="9529200" cy="787906"/>
-            </a:xfrm>
-            <a:prstGeom prst="rect">
-              <a:avLst/>
-            </a:prstGeom>
+          <a:prstGeom prst="rect">
+            <a:avLst/>
+          </a:prstGeom>
+          <a:noFill/>
+          <a:ln>
             <a:noFill/>
-            <a:ln>
-              <a:noFill/>
-            </a:ln>
-          </p:spPr>
-          <p:txBody>
-            <a:bodyPr spcFirstLastPara="1" wrap="square" lIns="0" tIns="0" rIns="0" bIns="0" anchor="t" anchorCtr="0">
-              <a:spAutoFit/>
-            </a:bodyPr>
-            <a:lstStyle/>
-            <a:p>
-              <a:pPr lvl="0" algn="ctr">
-                <a:lnSpc>
-                  <a:spcPct val="160000"/>
-                </a:lnSpc>
-              </a:pPr>
-              <a:r>
-                <a:rPr lang="en-US" sz="2400" dirty="0">
-                  <a:solidFill>
-                    <a:srgbClr val="003893"/>
-                  </a:solidFill>
-                  <a:latin typeface="Montserrat Medium"/>
-                  <a:ea typeface="Montserrat Medium"/>
-                  <a:cs typeface="Montserrat Medium"/>
-                  <a:sym typeface="Montserrat Medium"/>
-                </a:rPr>
-                <a:t>{{</a:t>
-              </a:r>
-              <a:r>
-                <a:rPr lang="en-US" sz="2400" dirty="0" err="1">
-                  <a:solidFill>
-                    <a:srgbClr val="003893"/>
-                  </a:solidFill>
-                  <a:latin typeface="Montserrat Medium"/>
-                  <a:ea typeface="Montserrat Medium"/>
-                  <a:cs typeface="Montserrat Medium"/>
-                  <a:sym typeface="Montserrat Medium"/>
-                </a:rPr>
-                <a:t>nombre</a:t>
-              </a:r>
-              <a:r>
-                <a:rPr lang="en-US" sz="2400" dirty="0">
-                  <a:solidFill>
-                    <a:srgbClr val="003893"/>
-                  </a:solidFill>
-                  <a:latin typeface="Montserrat Medium"/>
-                  <a:ea typeface="Montserrat Medium"/>
-                  <a:cs typeface="Montserrat Medium"/>
-                  <a:sym typeface="Montserrat Medium"/>
-                </a:rPr>
-                <a:t>}}</a:t>
-              </a:r>
-              <a:endParaRPr dirty="0"/>
-            </a:p>
-          </p:txBody>
-        </p:sp>
-        <p:cxnSp>
-          <p:nvCxnSpPr>
-            <p:cNvPr id="109" name="Google Shape;109;p1"/>
-            <p:cNvCxnSpPr/>
-            <p:nvPr/>
-          </p:nvCxnSpPr>
-          <p:spPr>
-            <a:xfrm>
-              <a:off x="0" y="873373"/>
-              <a:ext cx="9529060" cy="0"/>
-            </a:xfrm>
-            <a:prstGeom prst="straightConnector1">
-              <a:avLst/>
-            </a:prstGeom>
-            <a:noFill/>
-            <a:ln w="12700" cap="flat" cmpd="sng">
-              <a:solidFill>
-                <a:srgbClr val="003893"/>
-              </a:solidFill>
-              <a:prstDash val="solid"/>
-              <a:round/>
-              <a:headEnd type="none" w="sm" len="sm"/>
-              <a:tailEnd type="none" w="sm" len="sm"/>
-            </a:ln>
-          </p:spPr>
-        </p:cxnSp>
-      </p:grpSp>
+          </a:ln>
+        </p:spPr>
+        <p:txBody>
+          <a:bodyPr spcFirstLastPara="1" wrap="square" lIns="0" tIns="0" rIns="0" bIns="0" anchor="t" anchorCtr="0">
+            <a:spAutoFit/>
+          </a:bodyPr>
+          <a:lstStyle/>
+          <a:p>
+            <a:pPr lvl="0" algn="ctr"/>
+            <a:r>
+              <a:rPr lang="en-US" sz="2400" dirty="0">
+                <a:solidFill>
+                  <a:srgbClr val="003893"/>
+                </a:solidFill>
+                <a:latin typeface="Montserrat Medium"/>
+                <a:ea typeface="Montserrat Medium"/>
+                <a:cs typeface="Montserrat Medium"/>
+                <a:sym typeface="Montserrat Medium"/>
+              </a:rPr>
+              <a:t>{{</a:t>
+            </a:r>
+            <a:r>
+              <a:rPr lang="en-US" sz="2400" dirty="0" err="1">
+                <a:solidFill>
+                  <a:srgbClr val="003893"/>
+                </a:solidFill>
+                <a:latin typeface="Montserrat Medium"/>
+                <a:ea typeface="Montserrat Medium"/>
+                <a:cs typeface="Montserrat Medium"/>
+                <a:sym typeface="Montserrat Medium"/>
+              </a:rPr>
+              <a:t>nombre</a:t>
+            </a:r>
+            <a:r>
+              <a:rPr lang="en-US" sz="2400" dirty="0">
+                <a:solidFill>
+                  <a:srgbClr val="003893"/>
+                </a:solidFill>
+                <a:latin typeface="Montserrat Medium"/>
+                <a:ea typeface="Montserrat Medium"/>
+                <a:cs typeface="Montserrat Medium"/>
+                <a:sym typeface="Montserrat Medium"/>
+              </a:rPr>
+              <a:t>}}</a:t>
+            </a:r>
+            <a:endParaRPr dirty="0"/>
+          </a:p>
+        </p:txBody>
+      </p:sp>
+      <p:cxnSp>
+        <p:nvCxnSpPr>
+          <p:cNvPr id="109" name="Google Shape;109;p1"/>
+          <p:cNvCxnSpPr/>
+          <p:nvPr/>
+        </p:nvCxnSpPr>
+        <p:spPr>
+          <a:xfrm>
+            <a:off x="1379602" y="3365762"/>
+            <a:ext cx="7146795" cy="0"/>
+          </a:xfrm>
+          <a:prstGeom prst="straightConnector1">
+            <a:avLst/>
+          </a:prstGeom>
+          <a:noFill/>
+          <a:ln w="12700" cap="flat" cmpd="sng">
+            <a:solidFill>
+              <a:srgbClr val="003893"/>
+            </a:solidFill>
+            <a:prstDash val="solid"/>
+            <a:round/>
+            <a:headEnd type="none" w="sm" len="sm"/>
+            <a:tailEnd type="none" w="sm" len="sm"/>
+          </a:ln>
+        </p:spPr>
+      </p:cxnSp>
       <p:sp>
         <p:nvSpPr>
           <p:cNvPr id="110" name="Google Shape;110;p1"/>
@@ -13501,7 +13482,7 @@
         </p:nvSpPr>
         <p:spPr>
           <a:xfrm>
-            <a:off x="4005693" y="6632294"/>
+            <a:off x="2460885" y="6613244"/>
             <a:ext cx="4984228" cy="261610"/>
           </a:xfrm>
           <a:prstGeom prst="rect">
@@ -13518,17 +13499,9 @@
           </a:bodyPr>
           <a:lstStyle/>
           <a:p>
-            <a:pPr marL="0" marR="0" lvl="0" indent="0" algn="l" rtl="0">
-              <a:spcBef>
-                <a:spcPts val="0"/>
-              </a:spcBef>
-              <a:spcAft>
-                <a:spcPts val="0"/>
-              </a:spcAft>
-              <a:buNone/>
-            </a:pPr>
+            <a:pPr lvl="0" algn="ctr"/>
             <a:r>
-              <a:rPr lang="en-US" sz="1100" dirty="0">
+              <a:rPr lang="en-US" sz="1050" dirty="0">
                 <a:solidFill>
                   <a:schemeClr val="dk1"/>
                 </a:solidFill>
@@ -13540,7 +13513,7 @@
               <a:t>{{</a:t>
             </a:r>
             <a:r>
-              <a:rPr lang="en-US" sz="1100" dirty="0" err="1">
+              <a:rPr lang="en-US" sz="1050" dirty="0" err="1">
                 <a:solidFill>
                   <a:schemeClr val="dk1"/>
                 </a:solidFill>
@@ -13552,7 +13525,7 @@
               <a:t>codigo_diploma</a:t>
             </a:r>
             <a:r>
-              <a:rPr lang="en-US" sz="1100" dirty="0">
+              <a:rPr lang="en-US" sz="1050" dirty="0">
                 <a:solidFill>
                   <a:schemeClr val="dk1"/>
                 </a:solidFill>
@@ -13563,7 +13536,7 @@
               </a:rPr>
               <a:t>}}</a:t>
             </a:r>
-            <a:endParaRPr dirty="0"/>
+            <a:endParaRPr sz="1200" dirty="0"/>
           </a:p>
         </p:txBody>
       </p:sp>
